--- a/docs/formula-matching-slide.pptx
+++ b/docs/formula-matching-slide.pptx
@@ -3146,7 +3146,7 @@
         </p:nvGraphicFramePr>
         <p:xfrm>
           <a:off x="457200" y="1005840"/>
-          <a:ext cx="8229600" cy="6583679"/>
+          <a:ext cx="8229600" cy="6858000"/>
         </p:xfrm>
         <a:graphic>
           <a:graphicData uri="http://schemas.openxmlformats.org/drawingml/2006/table">
@@ -3159,7 +3159,7 @@
                 <a:gridCol w="2651760"/>
                 <a:gridCol w="4114800"/>
               </a:tblGrid>
-              <a:tr h="274319">
+              <a:tr h="274320">
                 <a:tc>
                   <a:txBody>
                     <a:bodyPr/>
@@ -3230,7 +3230,7 @@
                   </a:tcPr>
                 </a:tc>
               </a:tr>
-              <a:tr h="274319">
+              <a:tr h="274320">
                 <a:tc>
                   <a:txBody>
                     <a:bodyPr/>
@@ -3287,7 +3287,7 @@
                   <a:tcPr anchor="t"/>
                 </a:tc>
               </a:tr>
-              <a:tr h="274319">
+              <a:tr h="274320">
                 <a:tc>
                   <a:txBody>
                     <a:bodyPr/>
@@ -3351,7 +3351,7 @@
                   </a:tcPr>
                 </a:tc>
               </a:tr>
-              <a:tr h="274319">
+              <a:tr h="274320">
                 <a:tc>
                   <a:txBody>
                     <a:bodyPr/>
@@ -3408,7 +3408,7 @@
                   <a:tcPr anchor="t"/>
                 </a:tc>
               </a:tr>
-              <a:tr h="274319">
+              <a:tr h="274320">
                 <a:tc>
                   <a:txBody>
                     <a:bodyPr/>
@@ -3437,7 +3437,7 @@
                         <a:defRPr sz="900"/>
                       </a:pPr>
                       <a:r>
-                        <a:t>记住、回忆、遗忘、想起、熟悉、熟练、忘掉、检索、练习、重复、复述</a:t>
+                        <a:t>记住、回忆、遗忘、想起、熟悉、熟练、忘掉、检索、练习、重复、复述、脑网络、模块度、神经连接</a:t>
                       </a:r>
                     </a:p>
                   </a:txBody>
@@ -3494,6 +3494,26 @@
                         <a:t>• neural_firing_rate (stage-primitive)</a:t>
                       </a:r>
                     </a:p>
+                    <a:p>
+                      <a:r>
+                        <a:t>• pca_variance (stage-primitive)</a:t>
+                      </a:r>
+                    </a:p>
+                    <a:p>
+                      <a:r>
+                        <a:t>• kmo_test (stage-primitive)</a:t>
+                      </a:r>
+                    </a:p>
+                    <a:p>
+                      <a:r>
+                        <a:t>• bartlett_test (stage-primitive)</a:t>
+                      </a:r>
+                    </a:p>
+                    <a:p>
+                      <a:r>
+                        <a:t>• brain_network_modularity (stage-primitive)</a:t>
+                      </a:r>
+                    </a:p>
                   </a:txBody>
                   <a:tcPr anchor="t">
                     <a:solidFill>
@@ -3502,7 +3522,7 @@
                   </a:tcPr>
                 </a:tc>
               </a:tr>
-              <a:tr h="274319">
+              <a:tr h="274320">
                 <a:tc>
                   <a:txBody>
                     <a:bodyPr/>
@@ -3527,7 +3547,7 @@
                         <a:defRPr sz="900"/>
                       </a:pPr>
                       <a:r>
-                        <a:t>选择、决策、取舍、博弈、冲突</a:t>
+                        <a:t>选择、决策、取舍、博弈、冲突、纳什均衡、零和、pennies</a:t>
                       </a:r>
                     </a:p>
                   </a:txBody>
@@ -3595,11 +3615,16 @@
                         <a:t>• actr_expected_gain (stage-primitive)</a:t>
                       </a:r>
                     </a:p>
+                    <a:p>
+                      <a:r>
+                        <a:t>• matching_pennies (stage-primitive)</a:t>
+                      </a:r>
+                    </a:p>
                   </a:txBody>
                   <a:tcPr anchor="t"/>
                 </a:tc>
               </a:tr>
-              <a:tr h="274319">
+              <a:tr h="274320">
                 <a:tc>
                   <a:txBody>
                     <a:bodyPr/>
@@ -3673,7 +3698,7 @@
                   </a:tcPr>
                 </a:tc>
               </a:tr>
-              <a:tr h="274319">
+              <a:tr h="274320">
                 <a:tc>
                   <a:txBody>
                     <a:bodyPr/>
@@ -3730,7 +3755,7 @@
                   <a:tcPr anchor="t"/>
                 </a:tc>
               </a:tr>
-              <a:tr h="274319">
+              <a:tr h="274320">
                 <a:tc>
                   <a:txBody>
                     <a:bodyPr/>
@@ -3819,7 +3844,7 @@
                   </a:tcPr>
                 </a:tc>
               </a:tr>
-              <a:tr h="274319">
+              <a:tr h="274320">
                 <a:tc>
                   <a:txBody>
                     <a:bodyPr/>
@@ -3897,11 +3922,21 @@
                         <a:t>• actr_declarative_memory (stage-primitive)</a:t>
                       </a:r>
                     </a:p>
+                    <a:p>
+                      <a:r>
+                        <a:t>• irt_4pl (stage-primitive)</a:t>
+                      </a:r>
+                    </a:p>
+                    <a:p>
+                      <a:r>
+                        <a:t>• irt_test_information (stage-primitive)</a:t>
+                      </a:r>
+                    </a:p>
                   </a:txBody>
                   <a:tcPr anchor="t"/>
                 </a:tc>
               </a:tr>
-              <a:tr h="274319">
+              <a:tr h="274320">
                 <a:tc>
                   <a:txBody>
                     <a:bodyPr/>
@@ -3985,7 +4020,7 @@
                   </a:tcPr>
                 </a:tc>
               </a:tr>
-              <a:tr h="274319">
+              <a:tr h="274320">
                 <a:tc>
                   <a:txBody>
                     <a:bodyPr/>
@@ -4037,7 +4072,7 @@
                   <a:tcPr anchor="t"/>
                 </a:tc>
               </a:tr>
-              <a:tr h="274319">
+              <a:tr h="274320">
                 <a:tc>
                   <a:txBody>
                     <a:bodyPr/>
@@ -4111,7 +4146,7 @@
                   </a:tcPr>
                 </a:tc>
               </a:tr>
-              <a:tr h="274319">
+              <a:tr h="274320">
                 <a:tc>
                   <a:txBody>
                     <a:bodyPr/>
@@ -4168,7 +4203,7 @@
                   <a:tcPr anchor="t"/>
                 </a:tc>
               </a:tr>
-              <a:tr h="274319">
+              <a:tr h="274320">
                 <a:tc>
                   <a:txBody>
                     <a:bodyPr/>
@@ -4227,7 +4262,7 @@
                   </a:tcPr>
                 </a:tc>
               </a:tr>
-              <a:tr h="274319">
+              <a:tr h="274320">
                 <a:tc>
                   <a:txBody>
                     <a:bodyPr/>
@@ -4290,11 +4325,16 @@
                         <a:t>• odds_ratio (stage-primitive)</a:t>
                       </a:r>
                     </a:p>
+                    <a:p>
+                      <a:r>
+                        <a:t>• carnap_confirmation (stage-primitive)</a:t>
+                      </a:r>
+                    </a:p>
                   </a:txBody>
                   <a:tcPr anchor="t"/>
                 </a:tc>
               </a:tr>
-              <a:tr h="274319">
+              <a:tr h="274320">
                 <a:tc>
                   <a:txBody>
                     <a:bodyPr/>
@@ -4373,7 +4413,7 @@
                   </a:tcPr>
                 </a:tc>
               </a:tr>
-              <a:tr h="274319">
+              <a:tr h="274320">
                 <a:tc>
                   <a:txBody>
                     <a:bodyPr/>
@@ -4430,7 +4470,7 @@
                   <a:tcPr anchor="t"/>
                 </a:tc>
               </a:tr>
-              <a:tr h="274319">
+              <a:tr h="274320">
                 <a:tc>
                   <a:txBody>
                     <a:bodyPr/>
@@ -4504,7 +4544,7 @@
                   </a:tcPr>
                 </a:tc>
               </a:tr>
-              <a:tr h="274319">
+              <a:tr h="274320">
                 <a:tc>
                   <a:txBody>
                     <a:bodyPr/>
@@ -4561,7 +4601,7 @@
                   <a:tcPr anchor="t"/>
                 </a:tc>
               </a:tr>
-              <a:tr h="274319">
+              <a:tr h="274320">
                 <a:tc>
                   <a:txBody>
                     <a:bodyPr/>
@@ -4635,7 +4675,7 @@
                   </a:tcPr>
                 </a:tc>
               </a:tr>
-              <a:tr h="274319">
+              <a:tr h="274320">
                 <a:tc>
                   <a:txBody>
                     <a:bodyPr/>
@@ -4682,7 +4722,7 @@
                   <a:tcPr anchor="t"/>
                 </a:tc>
               </a:tr>
-              <a:tr h="274319">
+              <a:tr h="274320">
                 <a:tc>
                   <a:txBody>
                     <a:bodyPr/>
@@ -4746,7 +4786,7 @@
                   </a:tcPr>
                 </a:tc>
               </a:tr>
-              <a:tr h="274342">
+              <a:tr h="274320">
                 <a:tc>
                   <a:txBody>
                     <a:bodyPr/>
@@ -4794,8 +4834,72 @@
                         <a:t>• popper_corroboration (stage-primitive)</a:t>
                       </a:r>
                     </a:p>
+                    <a:p>
+                      <a:r>
+                        <a:t>• carnap_confirmation (stage-primitive)</a:t>
+                      </a:r>
+                    </a:p>
                   </a:txBody>
                   <a:tcPr anchor="t"/>
+                </a:tc>
+              </a:tr>
+              <a:tr h="274320">
+                <a:tc>
+                  <a:txBody>
+                    <a:bodyPr/>
+                    <a:lstStyle/>
+                    <a:p>
+                      <a:pPr>
+                        <a:defRPr sz="900"/>
+                      </a:pPr>
+                      <a:r>
+                        <a:t>neuroscience</a:t>
+                      </a:r>
+                    </a:p>
+                  </a:txBody>
+                  <a:tcPr anchor="t">
+                    <a:solidFill>
+                      <a:srgbClr val="F2F4F8"/>
+                    </a:solidFill>
+                  </a:tcPr>
+                </a:tc>
+                <a:tc>
+                  <a:txBody>
+                    <a:bodyPr/>
+                    <a:lstStyle/>
+                    <a:p>
+                      <a:pPr>
+                        <a:defRPr sz="900"/>
+                      </a:pPr>
+                      <a:r>
+                        <a:t>脑网络、模块度、神经可塑性、突触</a:t>
+                      </a:r>
+                    </a:p>
+                  </a:txBody>
+                  <a:tcPr anchor="t">
+                    <a:solidFill>
+                      <a:srgbClr val="F2F4F8"/>
+                    </a:solidFill>
+                  </a:tcPr>
+                </a:tc>
+                <a:tc>
+                  <a:txBody>
+                    <a:bodyPr/>
+                    <a:lstStyle/>
+                    <a:p>
+                      <a:pPr>
+                        <a:defRPr sz="900"/>
+                      </a:pPr>
+                      <a:r>
+                        <a:t>• brain_network_modularity (stage-primitive)</a:t>
+                      </a:r>
+                    </a:p>
+                  </a:txBody>
+                  <a:tcPr anchor="t">
+                    <a:solidFill>
+                      <a:srgbClr val="F2F4F8"/>
+                    </a:solidFill>
+                  </a:tcPr>
                 </a:tc>
               </a:tr>
             </a:tbl>

--- a/docs/formula-matching-slide.pptx
+++ b/docs/formula-matching-slide.pptx
@@ -3547,7 +3547,7 @@
                         <a:defRPr sz="900"/>
                       </a:pPr>
                       <a:r>
-                        <a:t>选择、决策、取舍、博弈、冲突、纳什均衡、零和、pennies</a:t>
+                        <a:t>选择、决策、取舍、博弈、冲突、纳什均衡、零和、pennies、决策时间、反应时、漂移率、决策动力学、扩散模型、信号检测、辨别力、虚报率、命中率</a:t>
                       </a:r>
                     </a:p>
                   </a:txBody>
@@ -3618,6 +3618,31 @@
                     <a:p>
                       <a:r>
                         <a:t>• matching_pennies (stage-primitive)</a:t>
+                      </a:r>
+                    </a:p>
+                    <a:p>
+                      <a:r>
+                        <a:t>• ddm_decision_time (stage-primitive)</a:t>
+                      </a:r>
+                    </a:p>
+                    <a:p>
+                      <a:r>
+                        <a:t>• ddm_error_rate (stage-primitive)</a:t>
+                      </a:r>
+                    </a:p>
+                    <a:p>
+                      <a:r>
+                        <a:t>• sdt_d_prime (stage-primitive)</a:t>
+                      </a:r>
+                    </a:p>
+                    <a:p>
+                      <a:r>
+                        <a:t>• sdt_beta (stage-primitive)</a:t>
+                      </a:r>
+                    </a:p>
+                    <a:p>
+                      <a:r>
+                        <a:t>• sdt_a_prime (stage-primitive)</a:t>
                       </a:r>
                     </a:p>
                   </a:txBody>
@@ -4254,6 +4279,21 @@
                         <a:t>• 期望效用(动机权衡)</a:t>
                       </a:r>
                     </a:p>
+                    <a:p>
+                      <a:r>
+                        <a:t>• sdt_d_prime (stage-primitive)</a:t>
+                      </a:r>
+                    </a:p>
+                    <a:p>
+                      <a:r>
+                        <a:t>• sdt_beta (stage-primitive)</a:t>
+                      </a:r>
+                    </a:p>
+                    <a:p>
+                      <a:r>
+                        <a:t>• sdt_a_prime (stage-primitive)</a:t>
+                      </a:r>
+                    </a:p>
                   </a:txBody>
                   <a:tcPr anchor="t">
                     <a:solidFill>
@@ -4569,7 +4609,7 @@
                         <a:defRPr sz="900"/>
                       </a:pPr>
                       <a:r>
-                        <a:t>自由能、预测误差、主动推断、最小化惊奇</a:t>
+                        <a:t>自由能、预测误差、主动推断、最小化惊奇、预期自由能、信息增益、认识性价值</a:t>
                       </a:r>
                     </a:p>
                   </a:txBody>
@@ -4595,6 +4635,11 @@
                     <a:p>
                       <a:r>
                         <a:t>• precision_weight (stage-primitive)</a:t>
+                      </a:r>
+                    </a:p>
+                    <a:p>
+                      <a:r>
+                        <a:t>• aif_info_gain (stage-primitive)</a:t>
                       </a:r>
                     </a:p>
                   </a:txBody>
